--- a/SWT2026_Project_Overview_v3.pptx
+++ b/SWT2026_Project_Overview_v3.pptx
@@ -3408,7 +3408,7 @@
         <p:spPr>
           <a:xfrm>
             <a:off x="914400" y="4096511"/>
-            <a:ext cx="5486400" cy="320040"/>
+            <a:ext cx="2872453" cy="307777"/>
           </a:xfrm>
           <a:prstGeom prst="rect">
             <a:avLst/>
@@ -3422,7 +3422,7 @@
           <a:lstStyle/>
           <a:p>
             <a:r>
-              <a:rPr sz="1400" b="1">
+              <a:rPr sz="1400" b="1" dirty="0">
                 <a:solidFill>
                   <a:srgbClr val="94A3B8"/>
                 </a:solidFill>
@@ -3431,13 +3431,22 @@
               <a:t>Course:  </a:t>
             </a:r>
             <a:r>
-              <a:rPr sz="1400">
+              <a:rPr lang="en-US" sz="1400" dirty="0">
                 <a:solidFill>
                   <a:srgbClr val="FFFFFF"/>
                 </a:solidFill>
                 <a:latin typeface="Calibri"/>
               </a:rPr>
-              <a:t>SWT 2026 - Software Testing</a:t>
+              <a:t>CEN 4072</a:t>
+            </a:r>
+            <a:r>
+              <a:rPr sz="1400" dirty="0">
+                <a:solidFill>
+                  <a:srgbClr val="FFFFFF"/>
+                </a:solidFill>
+                <a:latin typeface="Calibri"/>
+              </a:rPr>
+              <a:t> - Software Testing</a:t>
             </a:r>
           </a:p>
         </p:txBody>
@@ -3465,7 +3474,7 @@
           <a:lstStyle/>
           <a:p>
             <a:r>
-              <a:rPr sz="1400" b="1">
+              <a:rPr sz="1400" b="1" dirty="0">
                 <a:solidFill>
                   <a:srgbClr val="94A3B8"/>
                 </a:solidFill>
@@ -3474,7 +3483,7 @@
               <a:t>Institution:  </a:t>
             </a:r>
             <a:r>
-              <a:rPr sz="1400">
+              <a:rPr sz="1400" dirty="0">
                 <a:solidFill>
                   <a:srgbClr val="FFFFFF"/>
                 </a:solidFill>
@@ -3493,7 +3502,7 @@
         </p:nvSpPr>
         <p:spPr>
           <a:xfrm>
-            <a:off x="914400" y="4791455"/>
+            <a:off x="914400" y="5138927"/>
             <a:ext cx="5486400" cy="320040"/>
           </a:xfrm>
           <a:prstGeom prst="rect">
@@ -3558,6 +3567,79 @@
               </a:rPr>
               <a:t>github.com/MichaelMolczyk/SWT2026MicrocenterProject</a:t>
             </a:r>
+          </a:p>
+        </p:txBody>
+      </p:sp>
+      <p:sp>
+        <p:nvSpPr>
+          <p:cNvPr id="14" name="TextBox 13">
+            <a:extLst>
+              <a:ext uri="{FF2B5EF4-FFF2-40B4-BE49-F238E27FC236}">
+                <a16:creationId xmlns:a16="http://schemas.microsoft.com/office/drawing/2014/main" id="{F153B495-AFBA-8DE6-6938-A893F7840034}"/>
+              </a:ext>
+            </a:extLst>
+          </p:cNvPr>
+          <p:cNvSpPr txBox="1"/>
+          <p:nvPr/>
+        </p:nvSpPr>
+        <p:spPr>
+          <a:xfrm>
+            <a:off x="914400" y="4809837"/>
+            <a:ext cx="2676374" cy="307777"/>
+          </a:xfrm>
+          <a:prstGeom prst="rect">
+            <a:avLst/>
+          </a:prstGeom>
+          <a:noFill/>
+        </p:spPr>
+        <p:txBody>
+          <a:bodyPr wrap="none">
+            <a:spAutoFit/>
+          </a:bodyPr>
+          <a:lstStyle/>
+          <a:p>
+            <a:r>
+              <a:rPr lang="en-US" sz="1400" b="1" dirty="0">
+                <a:solidFill>
+                  <a:srgbClr val="94A3B8"/>
+                </a:solidFill>
+                <a:latin typeface="Calibri"/>
+              </a:rPr>
+              <a:t>Professor</a:t>
+            </a:r>
+            <a:r>
+              <a:rPr sz="1400" b="1" dirty="0">
+                <a:solidFill>
+                  <a:srgbClr val="94A3B8"/>
+                </a:solidFill>
+                <a:latin typeface="Calibri"/>
+              </a:rPr>
+              <a:t>:  </a:t>
+            </a:r>
+            <a:r>
+              <a:rPr lang="en-US" sz="1400" dirty="0">
+                <a:solidFill>
+                  <a:schemeClr val="bg1"/>
+                </a:solidFill>
+                <a:latin typeface="Calibri"/>
+              </a:rPr>
+              <a:t>Deepa </a:t>
+            </a:r>
+            <a:r>
+              <a:rPr lang="en-US" sz="1400" dirty="0" err="1">
+                <a:solidFill>
+                  <a:schemeClr val="bg1"/>
+                </a:solidFill>
+                <a:latin typeface="Calibri"/>
+              </a:rPr>
+              <a:t>Devasenapathy</a:t>
+            </a:r>
+            <a:endParaRPr sz="1400" dirty="0">
+              <a:solidFill>
+                <a:schemeClr val="bg1"/>
+              </a:solidFill>
+              <a:latin typeface="Calibri"/>
+            </a:endParaRPr>
           </a:p>
         </p:txBody>
       </p:sp>
